--- a/report/data_cluster/flow_pooled_slides.pptx
+++ b/report/data_cluster/flow_pooled_slides.pptx
@@ -3259,7 +3259,7 @@
                 </a:solidFill>
                 <a:latin typeface="Garamond"/>
               </a:rPr>
-              <a:t>Pooled 2002–24</a:t>
+              <a:t>Pooled 1997–24</a:t>
             </a:r>
           </a:p>
         </p:txBody>
@@ -3316,7 +3316,7 @@
                 </a:solidFill>
                 <a:latin typeface="Garamond"/>
               </a:rPr>
-              <a:t>The same flow, pooled 2002–2024</a:t>
+              <a:t>The same flow, pooled 1997–2024</a:t>
             </a:r>
           </a:p>
         </p:txBody>
@@ -3354,7 +3354,7 @@
         <p:spPr>
           <a:xfrm>
             <a:off x="822960" y="5715000"/>
-            <a:ext cx="10789920" cy="822960"/>
+            <a:ext cx="10789920" cy="914400"/>
           </a:xfrm>
           <a:prstGeom prst="rect">
             <a:avLst/>
@@ -3379,7 +3379,7 @@
                 </a:solidFill>
                 <a:latin typeface="Garamond"/>
               </a:rPr>
-              <a:t>Over the whole comparable-codes period (5,791 leavers) the composition barely moves: 26 to another job, 35 retired, 27 out of the labor force before 55 and 12 unemployed; the employed split is 22 / 9 / 30 / 39 percent. The five-year window is not driving the picture.</a:t>
+              <a:t>Over the whole period 1997–2024 (6,866 leavers, destination groups mapped across the 1990 and 2002/2010/2018 classifications) the composition barely moves: 27 to another job, 33 retired, 28 out of the labor force before 55 and 12 unemployed; the employed split is 22 / 8 / 30 / 40 percent. The five-year window is not driving the picture.</a:t>
             </a:r>
           </a:p>
         </p:txBody>
